--- a/slides/decks/s17-marrow-failure-hemoglobinopathies.pptx
+++ b/slides/decks/s17-marrow-failure-hemoglobinopathies.pptx
@@ -136,13 +136,13 @@
   <p:extLst>
     <p:ext uri="{521415D9-36F7-43E2-AB2F-B90AF26B5E84}">
       <p14:sectionLst xmlns:p14="http://schemas.microsoft.com/office/powerpoint/2010/main">
-        <p14:section name="Opening" id="{d62f1f4b-180e-4d53-81db-f93b19eba4b2}">
+        <p14:section name="Opening" id="{ea964e8a-3a99-dab5-f40b-58dd3a947c30}">
           <p14:sldIdLst>
             <p14:sldId id="256"/>
             <p14:sldId id="257"/>
           </p14:sldIdLst>
         </p14:section>
-        <p14:section name="Aplastic anaemia and PNH" id="{d405507b-086f-937a-6f17-90e15e917677}">
+        <p14:section name="Aplastic anaemia and PNH" id="{db5035a1-41ad-b1a6-8dcc-a39f03caac8e}">
           <p14:sldIdLst>
             <p14:sldId id="258"/>
             <p14:sldId id="259"/>
@@ -151,7 +151,7 @@
             <p14:sldId id="262"/>
           </p14:sldIdLst>
         </p14:section>
-        <p14:section name="Inherited marrow failure" id="{47ded2b6-f7e6-c0a6-277a-b1f4919d0cc1}">
+        <p14:section name="Inherited marrow failure" id="{d9bbbf90-4f1e-133e-20ed-6043d11e7eec}">
           <p14:sldIdLst>
             <p14:sldId id="263"/>
             <p14:sldId id="264"/>
@@ -159,7 +159,7 @@
             <p14:sldId id="266"/>
           </p14:sldIdLst>
         </p14:section>
-        <p14:section name="Haemoglobinopathies" id="{09d9b740-558a-58d5-66e1-aa15d62cb9b7}">
+        <p14:section name="Haemoglobinopathies" id="{6184812c-753f-8c85-9398-7ebf1d1d2309}">
           <p14:sldIdLst>
             <p14:sldId id="267"/>
             <p14:sldId id="268"/>
@@ -168,7 +168,7 @@
             <p14:sldId id="271"/>
           </p14:sldIdLst>
         </p14:section>
-        <p14:section name="Board questions" id="{7ec08b84-aad3-f545-ff5a-bde29bc8e372}">
+        <p14:section name="Board questions" id="{f8bfb331-d9c4-6aaf-e4c1-9617ce38ad80}">
           <p14:sldIdLst>
             <p14:sldId id="272"/>
             <p14:sldId id="273"/>
@@ -178,7 +178,7 @@
             <p14:sldId id="277"/>
           </p14:sldIdLst>
         </p14:section>
-        <p14:section name="References" id="{06ed0a28-c0a9-f926-5a45-1096e6793487}">
+        <p14:section name="References" id="{62fc93ad-3f22-5366-803a-d23f471d8158}">
           <p14:sldIdLst>
             <p14:sldId id="278"/>
             <p14:sldId id="279"/>
@@ -186,7 +186,7 @@
             <p14:sldId id="281"/>
           </p14:sldIdLst>
         </p14:section>
-        <p14:section name="Backup" id="{cba94cff-cc95-bd98-1734-72f7235ec294}">
+        <p14:section name="Backup" id="{263d1035-874a-c9b9-88f6-28e1fd24bc7e}">
           <p14:sldIdLst>
             <p14:sldId id="282"/>
             <p14:sldId id="283"/>
@@ -5602,7 +5602,7 @@
       </p:sp>
       <p:graphicFrame>
         <p:nvGraphicFramePr>
-          <p:cNvPr id="11" name="Table 42"/>
+          <p:cNvPr id="11" name="Table 41"/>
           <p:cNvGraphicFramePr>
             <a:graphicFrameLocks noGrp="1"/>
           </p:cNvGraphicFramePr>
@@ -5956,7 +5956,21 @@
                             <a:schemeClr val="tx1"/>
                           </a:solidFill>
                         </a:rPr>
-                        <a:t>Progressive BMF, no major organ damage</a:t>
+                        <a:t>Progressive BMF without</a:t>
+                      </a:r>
+                      <a:endParaRPr lang="en-US" sz="1400" dirty="0"/>
+                    </a:p>
+                    <a:p>
+                      <a:pPr indent="0" marL="0">
+                        <a:buNone/>
+                      </a:pPr>
+                      <a:r>
+                        <a:rPr lang="en-US" sz="1400" dirty="0">
+                          <a:solidFill>
+                            <a:schemeClr val="tx1"/>
+                          </a:solidFill>
+                        </a:rPr>
+                        <a:t>organ damage</a:t>
                       </a:r>
                       <a:endParaRPr lang="en-US" sz="1400" dirty="0"/>
                     </a:p>
@@ -6036,7 +6050,21 @@
                             <a:schemeClr val="tx1"/>
                           </a:solidFill>
                         </a:rPr>
-                        <a:t>OS 57% at 5 y, 23% at 10 y</a:t>
+                        <a:t>5-y OS 57%;</a:t>
+                      </a:r>
+                      <a:endParaRPr lang="en-US" sz="1400" dirty="0"/>
+                    </a:p>
+                    <a:p>
+                      <a:pPr indent="0" marL="0">
+                        <a:buNone/>
+                      </a:pPr>
+                      <a:r>
+                        <a:rPr lang="en-US" sz="1400" dirty="0">
+                          <a:solidFill>
+                            <a:schemeClr val="tx1"/>
+                          </a:solidFill>
+                        </a:rPr>
+                        <a:t>10-y OS 23%</a:t>
                       </a:r>
                       <a:endParaRPr lang="en-US" sz="1400" dirty="0"/>
                     </a:p>
@@ -6238,7 +6266,21 @@
                             <a:schemeClr val="tx1"/>
                           </a:solidFill>
                         </a:rPr>
-                        <a:t>5-y OS 82%, TRM 17%</a:t>
+                        <a:t>5-y OS 82%;</a:t>
+                      </a:r>
+                      <a:endParaRPr lang="en-US" sz="1400" dirty="0"/>
+                    </a:p>
+                    <a:p>
+                      <a:pPr indent="0" marL="0">
+                        <a:buNone/>
+                      </a:pPr>
+                      <a:r>
+                        <a:rPr lang="en-US" sz="1400" dirty="0">
+                          <a:solidFill>
+                            <a:schemeClr val="tx1"/>
+                          </a:solidFill>
+                        </a:rPr>
+                        <a:t>TRM 17%</a:t>
                       </a:r>
                       <a:endParaRPr lang="en-US" sz="1400" dirty="0"/>
                     </a:p>
@@ -6360,7 +6402,21 @@
                             <a:schemeClr val="tx1"/>
                           </a:solidFill>
                         </a:rPr>
-                        <a:t>Rising cytopenias; before leukaemia</a:t>
+                        <a:t>Rising cytopenias;</a:t>
+                      </a:r>
+                      <a:endParaRPr lang="en-US" sz="1400" dirty="0"/>
+                    </a:p>
+                    <a:p>
+                      <a:pPr indent="0" marL="0">
+                        <a:buNone/>
+                      </a:pPr>
+                      <a:r>
+                        <a:rPr lang="en-US" sz="1400" dirty="0">
+                          <a:solidFill>
+                            <a:schemeClr val="tx1"/>
+                          </a:solidFill>
+                        </a:rPr>
+                        <a:t>before leukaemia</a:t>
                       </a:r>
                       <a:endParaRPr lang="en-US" sz="1400" dirty="0"/>
                     </a:p>
@@ -6440,7 +6496,21 @@
                             <a:schemeClr val="tx1"/>
                           </a:solidFill>
                         </a:rPr>
-                        <a:t>5-y OS 63.3%, TRM 19.8%</a:t>
+                        <a:t>5-y OS 63.3%;</a:t>
+                      </a:r>
+                      <a:endParaRPr lang="en-US" sz="1400" dirty="0"/>
+                    </a:p>
+                    <a:p>
+                      <a:pPr indent="0" marL="0">
+                        <a:buNone/>
+                      </a:pPr>
+                      <a:r>
+                        <a:rPr lang="en-US" sz="1400" dirty="0">
+                          <a:solidFill>
+                            <a:schemeClr val="tx1"/>
+                          </a:solidFill>
+                        </a:rPr>
+                        <a:t>TRM 19.8%</a:t>
                       </a:r>
                       <a:endParaRPr lang="en-US" sz="1400" dirty="0"/>
                     </a:p>
@@ -6562,7 +6632,21 @@
                             <a:schemeClr val="tx1"/>
                           </a:solidFill>
                         </a:rPr>
-                        <a:t>Steroid failure or ≥ 0.3 mg/kg/d; best &lt; 10 y</a:t>
+                        <a:t>Steroid failure or ≥ 0.3 mg/kg/d;</a:t>
+                      </a:r>
+                      <a:endParaRPr lang="en-US" sz="1400" dirty="0"/>
+                    </a:p>
+                    <a:p>
+                      <a:pPr indent="0" marL="0">
+                        <a:buNone/>
+                      </a:pPr>
+                      <a:r>
+                        <a:rPr lang="en-US" sz="1400" dirty="0">
+                          <a:solidFill>
+                            <a:schemeClr val="tx1"/>
+                          </a:solidFill>
+                        </a:rPr>
+                        <a:t>best before 10 y</a:t>
                       </a:r>
                       <a:endParaRPr lang="en-US" sz="1400" dirty="0"/>
                     </a:p>
@@ -6642,7 +6726,21 @@
                             <a:schemeClr val="tx1"/>
                           </a:solidFill>
                         </a:rPr>
-                        <a:t>cGFS 90% &lt; 10 y, 78% 10–18 y</a:t>
+                        <a:t>cGFS 90% (&lt; 10 y);</a:t>
+                      </a:r>
+                      <a:endParaRPr lang="en-US" sz="1400" dirty="0"/>
+                    </a:p>
+                    <a:p>
+                      <a:pPr indent="0" marL="0">
+                        <a:buNone/>
+                      </a:pPr>
+                      <a:r>
+                        <a:rPr lang="en-US" sz="1400" dirty="0">
+                          <a:solidFill>
+                            <a:schemeClr val="tx1"/>
+                          </a:solidFill>
+                        </a:rPr>
+                        <a:t>78% (10–18 y)</a:t>
                       </a:r>
                       <a:endParaRPr lang="en-US" sz="1400" dirty="0"/>
                     </a:p>
@@ -6804,7 +6902,21 @@
                             <a:schemeClr val="tx1"/>
                           </a:solidFill>
                         </a:rPr>
-                        <a:t>MAC: FLU + TREO or BU</a:t>
+                        <a:t>MAC: FLU +</a:t>
+                      </a:r>
+                      <a:endParaRPr lang="en-US" sz="1400" dirty="0"/>
+                    </a:p>
+                    <a:p>
+                      <a:pPr indent="0" marL="0">
+                        <a:buNone/>
+                      </a:pPr>
+                      <a:r>
+                        <a:rPr lang="en-US" sz="1400" dirty="0">
+                          <a:solidFill>
+                            <a:schemeClr val="tx1"/>
+                          </a:solidFill>
+                        </a:rPr>
+                        <a:t>TREO or BU</a:t>
                       </a:r>
                       <a:endParaRPr lang="en-US" sz="1400" dirty="0"/>
                     </a:p>
@@ -6844,7 +6956,21 @@
                             <a:schemeClr val="tx1"/>
                           </a:solidFill>
                         </a:rPr>
-                        <a:t>6-y OS 85.6%, TRM 8%</a:t>
+                        <a:t>6-y OS 85.6%;</a:t>
+                      </a:r>
+                      <a:endParaRPr lang="en-US" sz="1400" dirty="0"/>
+                    </a:p>
+                    <a:p>
+                      <a:pPr indent="0" marL="0">
+                        <a:buNone/>
+                      </a:pPr>
+                      <a:r>
+                        <a:rPr lang="en-US" sz="1400" dirty="0">
+                          <a:solidFill>
+                            <a:schemeClr val="tx1"/>
+                          </a:solidFill>
+                        </a:rPr>
+                        <a:t>TRM 8%</a:t>
                       </a:r>
                       <a:endParaRPr lang="en-US" sz="1400" dirty="0"/>
                     </a:p>
@@ -7061,7 +7187,7 @@
       </p:sp>
       <p:graphicFrame>
         <p:nvGraphicFramePr>
-          <p:cNvPr id="12" name="Table 43"/>
+          <p:cNvPr id="12" name="Table 42"/>
           <p:cNvGraphicFramePr>
             <a:graphicFrameLocks noGrp="1"/>
           </p:cNvGraphicFramePr>
@@ -7943,7 +8069,7 @@
       </p:sp>
       <p:graphicFrame>
         <p:nvGraphicFramePr>
-          <p:cNvPr id="13" name="Table 44"/>
+          <p:cNvPr id="13" name="Table 43"/>
           <p:cNvGraphicFramePr>
             <a:graphicFrameLocks noGrp="1"/>
           </p:cNvGraphicFramePr>
@@ -8785,7 +8911,7 @@
       </p:sp>
       <p:graphicFrame>
         <p:nvGraphicFramePr>
-          <p:cNvPr id="14" name="Table 45"/>
+          <p:cNvPr id="14" name="Table 44"/>
           <p:cNvGraphicFramePr>
             <a:graphicFrameLocks noGrp="1"/>
           </p:cNvGraphicFramePr>
@@ -9101,7 +9227,21 @@
                             <a:schemeClr val="tx1"/>
                           </a:solidFill>
                         </a:rPr>
-                        <a:t>Why FTT</a:t>
+                        <a:t>Why FTT (FLU,</a:t>
+                      </a:r>
+                      <a:endParaRPr lang="en-US" sz="1600" dirty="0"/>
+                    </a:p>
+                    <a:p>
+                      <a:pPr indent="0" marL="0">
+                        <a:buNone/>
+                      </a:pPr>
+                      <a:r>
+                        <a:rPr lang="en-US" sz="1600" dirty="0">
+                          <a:solidFill>
+                            <a:schemeClr val="tx1"/>
+                          </a:solidFill>
+                        </a:rPr>
+                        <a:t>treosulfan, thiotepa)</a:t>
                       </a:r>
                       <a:endParaRPr lang="en-US" sz="1600" dirty="0"/>
                     </a:p>
@@ -9756,42 +9896,6 @@
           </a:graphicData>
         </a:graphic>
       </p:graphicFrame>
-      <p:sp>
-        <p:nvSpPr>
-          <p:cNvPr id="7" name="Text 46"/>
-          <p:cNvSpPr txBox="1"/>
-          <p:nvPr/>
-        </p:nvSpPr>
-        <p:spPr>
-          <a:xfrm>
-            <a:off x="685800" y="5486400"/>
-            <a:ext cx="10817352" cy="411480"/>
-          </a:xfrm>
-          <a:prstGeom prst="rect">
-            <a:avLst/>
-          </a:prstGeom>
-          <a:noFill/>
-          <a:ln/>
-        </p:spPr>
-        <p:txBody>
-          <a:bodyPr wrap="square" lIns="0" tIns="0" rIns="0" bIns="0" rtlCol="0" anchor="t"/>
-          <a:lstStyle/>
-          <a:p>
-            <a:pPr indent="0" marL="0">
-              <a:buNone/>
-            </a:pPr>
-            <a:r>
-              <a:rPr lang="en-US" sz="1600" b="1" dirty="0">
-                <a:solidFill>
-                  <a:schemeClr val="tx1"/>
-                </a:solidFill>
-              </a:rPr>
-              <a:t>FTT = fludarabine, treosulfan, thiotepa</a:t>
-            </a:r>
-            <a:endParaRPr lang="en-US" sz="1600" dirty="0"/>
-          </a:p>
-        </p:txBody>
-      </p:sp>
       <p:sp>
         <p:nvSpPr>
           <p:cNvPr id="25" name="Slide Number Placeholder 0"/>
@@ -9978,7 +10082,7 @@
       </p:sp>
       <p:graphicFrame>
         <p:nvGraphicFramePr>
-          <p:cNvPr id="15" name="Table 47"/>
+          <p:cNvPr id="15" name="Table 45"/>
           <p:cNvGraphicFramePr>
             <a:graphicFrameLocks noGrp="1"/>
           </p:cNvGraphicFramePr>
@@ -10285,21 +10389,7 @@
                             <a:schemeClr val="tx1"/>
                           </a:solidFill>
                         </a:rPr>
-                        <a:t>1 or 2 of the 3</a:t>
-                      </a:r>
-                      <a:endParaRPr lang="en-US" sz="2000" dirty="0"/>
-                    </a:p>
-                    <a:p>
-                      <a:pPr indent="0" marL="0">
-                        <a:buNone/>
-                      </a:pPr>
-                      <a:r>
-                        <a:rPr lang="en-US" sz="2000" dirty="0">
-                          <a:solidFill>
-                            <a:schemeClr val="tx1"/>
-                          </a:solidFill>
-                        </a:rPr>
-                        <a:t>risk factors present</a:t>
+                        <a:t>1 or 2 present</a:t>
                       </a:r>
                       <a:endParaRPr lang="en-US" sz="2000" dirty="0"/>
                     </a:p>
@@ -10455,6 +10545,14 @@
                       <a:pPr indent="0" marL="0">
                         <a:buNone/>
                       </a:pPr>
+                      <a:r>
+                        <a:rPr lang="en-US" sz="2000" dirty="0">
+                          <a:solidFill>
+                            <a:schemeClr val="tx1"/>
+                          </a:solidFill>
+                        </a:rPr>
+                        <a:t>1 or 2 present</a:t>
+                      </a:r>
                       <a:endParaRPr lang="en-US" sz="2000" dirty="0"/>
                     </a:p>
                   </a:txBody>
@@ -10609,6 +10707,14 @@
                       <a:pPr indent="0" marL="0">
                         <a:buNone/>
                       </a:pPr>
+                      <a:r>
+                        <a:rPr lang="en-US" sz="2000" dirty="0">
+                          <a:solidFill>
+                            <a:schemeClr val="tx1"/>
+                          </a:solidFill>
+                        </a:rPr>
+                        <a:t>1 or 2 present</a:t>
+                      </a:r>
                       <a:endParaRPr lang="en-US" sz="2000" dirty="0"/>
                     </a:p>
                   </a:txBody>
@@ -10680,13 +10786,13 @@
       </p:graphicFrame>
       <p:sp>
         <p:nvSpPr>
-          <p:cNvPr id="7" name="Text 48"/>
+          <p:cNvPr id="7" name="Text 46"/>
           <p:cNvSpPr txBox="1"/>
           <p:nvPr/>
         </p:nvSpPr>
         <p:spPr>
           <a:xfrm>
-            <a:off x="685800" y="3611880"/>
+            <a:off x="685800" y="4114800"/>
             <a:ext cx="10817352" cy="411480"/>
           </a:xfrm>
           <a:prstGeom prst="rect">
@@ -10900,7 +11006,7 @@
       </p:sp>
       <p:graphicFrame>
         <p:nvGraphicFramePr>
-          <p:cNvPr id="16" name="Table 49"/>
+          <p:cNvPr id="16" name="Table 47"/>
           <p:cNvGraphicFramePr>
             <a:graphicFrameLocks noGrp="1"/>
           </p:cNvGraphicFramePr>
@@ -11864,7 +11970,7 @@
       </p:sp>
       <p:sp>
         <p:nvSpPr>
-          <p:cNvPr id="6" name="Box 50"/>
+          <p:cNvPr id="6" name="Box 48"/>
           <p:cNvSpPr txBox="1"/>
           <p:nvPr/>
         </p:nvSpPr>
@@ -11976,7 +12082,7 @@
       </p:sp>
       <p:sp>
         <p:nvSpPr>
-          <p:cNvPr id="10" name="Text 51"/>
+          <p:cNvPr id="10" name="Text 49"/>
           <p:cNvSpPr txBox="1"/>
           <p:nvPr/>
         </p:nvSpPr>
@@ -12014,7 +12120,7 @@
       </p:sp>
       <p:sp>
         <p:nvSpPr>
-          <p:cNvPr id="11" name="Box 52"/>
+          <p:cNvPr id="11" name="Box 50"/>
           <p:cNvSpPr txBox="1"/>
           <p:nvPr/>
         </p:nvSpPr>
@@ -12048,7 +12154,21 @@
                   <a:schemeClr val="tx1"/>
                 </a:solidFill>
               </a:rPr>
-              <a:t>Split chimerism: myeloid all donor</a:t>
+              <a:t>Split chimerism:</a:t>
+            </a:r>
+            <a:endParaRPr lang="en-US" sz="1600" dirty="0"/>
+          </a:p>
+          <a:p>
+            <a:pPr algn="ctr" indent="0" marL="0">
+              <a:buNone/>
+            </a:pPr>
+            <a:r>
+              <a:rPr lang="en-US" sz="1600" b="1" dirty="0">
+                <a:solidFill>
+                  <a:schemeClr val="tx1"/>
+                </a:solidFill>
+              </a:rPr>
+              <a:t>myeloid all donor</a:t>
             </a:r>
             <a:endParaRPr lang="en-US" sz="1600" dirty="0"/>
           </a:p>
@@ -12080,7 +12200,7 @@
       </p:sp>
       <p:sp>
         <p:nvSpPr>
-          <p:cNvPr id="13" name="Box 53"/>
+          <p:cNvPr id="13" name="Box 51"/>
           <p:cNvSpPr txBox="1"/>
           <p:nvPr/>
         </p:nvSpPr>
@@ -12114,7 +12234,21 @@
                   <a:schemeClr val="tx1"/>
                 </a:solidFill>
               </a:rPr>
-              <a:t>Watch and wait; full donor not needed</a:t>
+              <a:t>Watch and wait;</a:t>
+            </a:r>
+            <a:endParaRPr lang="en-US" sz="1500" dirty="0"/>
+          </a:p>
+          <a:p>
+            <a:pPr algn="ctr" indent="0" marL="0">
+              <a:buNone/>
+            </a:pPr>
+            <a:r>
+              <a:rPr lang="en-US" sz="1500" dirty="0">
+                <a:solidFill>
+                  <a:schemeClr val="tx1"/>
+                </a:solidFill>
+              </a:rPr>
+              <a:t>full donor not needed</a:t>
             </a:r>
             <a:endParaRPr lang="en-US" sz="1500" dirty="0"/>
           </a:p>
@@ -12146,7 +12280,7 @@
       </p:sp>
       <p:sp>
         <p:nvSpPr>
-          <p:cNvPr id="15" name="Text 54"/>
+          <p:cNvPr id="15" name="Text 52"/>
           <p:cNvSpPr txBox="1"/>
           <p:nvPr/>
         </p:nvSpPr>
@@ -12184,7 +12318,7 @@
       </p:sp>
       <p:sp>
         <p:nvSpPr>
-          <p:cNvPr id="16" name="Box 55"/>
+          <p:cNvPr id="16" name="Box 53"/>
           <p:cNvSpPr txBox="1"/>
           <p:nvPr/>
         </p:nvSpPr>
@@ -12250,7 +12384,7 @@
       </p:sp>
       <p:sp>
         <p:nvSpPr>
-          <p:cNvPr id="18" name="Box 56"/>
+          <p:cNvPr id="18" name="Box 54"/>
           <p:cNvSpPr txBox="1"/>
           <p:nvPr/>
         </p:nvSpPr>
@@ -12284,7 +12418,21 @@
                   <a:schemeClr val="tx1"/>
                 </a:solidFill>
               </a:rPr>
-              <a:t>Keep or add MMF to raise donor share</a:t>
+              <a:t>Keep or add MMF</a:t>
+            </a:r>
+            <a:endParaRPr lang="en-US" sz="1500" dirty="0"/>
+          </a:p>
+          <a:p>
+            <a:pPr algn="ctr" indent="0" marL="0">
+              <a:buNone/>
+            </a:pPr>
+            <a:r>
+              <a:rPr lang="en-US" sz="1500" dirty="0">
+                <a:solidFill>
+                  <a:schemeClr val="tx1"/>
+                </a:solidFill>
+              </a:rPr>
+              <a:t>to raise donor share</a:t>
             </a:r>
             <a:endParaRPr lang="en-US" sz="1500" dirty="0"/>
           </a:p>
@@ -12316,7 +12464,7 @@
       </p:sp>
       <p:sp>
         <p:nvSpPr>
-          <p:cNvPr id="20" name="Text 57"/>
+          <p:cNvPr id="20" name="Text 55"/>
           <p:cNvSpPr txBox="1"/>
           <p:nvPr/>
         </p:nvSpPr>
@@ -12354,7 +12502,7 @@
       </p:sp>
       <p:sp>
         <p:nvSpPr>
-          <p:cNvPr id="21" name="Box 58"/>
+          <p:cNvPr id="21" name="Box 56"/>
           <p:cNvSpPr txBox="1"/>
           <p:nvPr/>
         </p:nvSpPr>
@@ -12420,7 +12568,7 @@
       </p:sp>
       <p:sp>
         <p:nvSpPr>
-          <p:cNvPr id="23" name="Box 59"/>
+          <p:cNvPr id="23" name="Box 57"/>
           <p:cNvSpPr txBox="1"/>
           <p:nvPr/>
         </p:nvSpPr>
@@ -12454,7 +12602,21 @@
                   <a:schemeClr val="tx1"/>
                 </a:solidFill>
               </a:rPr>
-              <a:t>Risk of GVHD; efficacy can be limited</a:t>
+              <a:t>GVHD risk;</a:t>
+            </a:r>
+            <a:endParaRPr lang="en-US" sz="1500" dirty="0"/>
+          </a:p>
+          <a:p>
+            <a:pPr algn="ctr" indent="0" marL="0">
+              <a:buNone/>
+            </a:pPr>
+            <a:r>
+              <a:rPr lang="en-US" sz="1500" dirty="0">
+                <a:solidFill>
+                  <a:schemeClr val="tx1"/>
+                </a:solidFill>
+              </a:rPr>
+              <a:t>efficacy can be limited</a:t>
             </a:r>
             <a:endParaRPr lang="en-US" sz="1500" dirty="0"/>
           </a:p>
@@ -12646,7 +12808,7 @@
       </p:sp>
       <p:sp>
         <p:nvSpPr>
-          <p:cNvPr id="6" name="Text 60"/>
+          <p:cNvPr id="6" name="Text 58"/>
           <p:cNvSpPr txBox="1"/>
           <p:nvPr/>
         </p:nvSpPr>
@@ -12682,7 +12844,7 @@
       </p:sp>
       <p:sp>
         <p:nvSpPr>
-          <p:cNvPr id="7" name="Text 61"/>
+          <p:cNvPr id="7" name="Text 59"/>
           <p:cNvSpPr txBox="1"/>
           <p:nvPr/>
         </p:nvSpPr>
@@ -12973,7 +13135,7 @@
       </p:sp>
       <p:sp>
         <p:nvSpPr>
-          <p:cNvPr id="6" name="Box 62"/>
+          <p:cNvPr id="6" name="Box 60"/>
           <p:cNvSpPr txBox="1"/>
           <p:nvPr/>
         </p:nvSpPr>
@@ -13015,7 +13177,7 @@
       </p:sp>
       <p:sp>
         <p:nvSpPr>
-          <p:cNvPr id="7" name="Text 63"/>
+          <p:cNvPr id="7" name="Text 61"/>
           <p:cNvSpPr txBox="1"/>
           <p:nvPr/>
         </p:nvSpPr>
@@ -13235,7 +13397,7 @@
       </p:sp>
       <p:sp>
         <p:nvSpPr>
-          <p:cNvPr id="6" name="Text 64"/>
+          <p:cNvPr id="6" name="Text 62"/>
           <p:cNvSpPr txBox="1"/>
           <p:nvPr/>
         </p:nvSpPr>
@@ -13271,7 +13433,7 @@
       </p:sp>
       <p:sp>
         <p:nvSpPr>
-          <p:cNvPr id="7" name="Text 65"/>
+          <p:cNvPr id="7" name="Text 63"/>
           <p:cNvSpPr txBox="1"/>
           <p:nvPr/>
         </p:nvSpPr>
@@ -14403,7 +14565,7 @@
       </p:sp>
       <p:sp>
         <p:nvSpPr>
-          <p:cNvPr id="6" name="Box 66"/>
+          <p:cNvPr id="6" name="Box 64"/>
           <p:cNvSpPr txBox="1"/>
           <p:nvPr/>
         </p:nvSpPr>
@@ -14445,7 +14607,7 @@
       </p:sp>
       <p:sp>
         <p:nvSpPr>
-          <p:cNvPr id="7" name="Text 67"/>
+          <p:cNvPr id="7" name="Text 65"/>
           <p:cNvSpPr txBox="1"/>
           <p:nvPr/>
         </p:nvSpPr>
@@ -14665,7 +14827,7 @@
       </p:sp>
       <p:sp>
         <p:nvSpPr>
-          <p:cNvPr id="6" name="Text 68"/>
+          <p:cNvPr id="6" name="Text 66"/>
           <p:cNvSpPr txBox="1"/>
           <p:nvPr/>
         </p:nvSpPr>
@@ -14701,7 +14863,7 @@
       </p:sp>
       <p:sp>
         <p:nvSpPr>
-          <p:cNvPr id="7" name="Text 69"/>
+          <p:cNvPr id="7" name="Text 67"/>
           <p:cNvSpPr txBox="1"/>
           <p:nvPr/>
         </p:nvSpPr>
@@ -14992,7 +15154,7 @@
       </p:sp>
       <p:sp>
         <p:nvSpPr>
-          <p:cNvPr id="6" name="Box 70"/>
+          <p:cNvPr id="6" name="Box 68"/>
           <p:cNvSpPr txBox="1"/>
           <p:nvPr/>
         </p:nvSpPr>
@@ -15034,7 +15196,7 @@
       </p:sp>
       <p:sp>
         <p:nvSpPr>
-          <p:cNvPr id="7" name="Text 71"/>
+          <p:cNvPr id="7" name="Text 69"/>
           <p:cNvSpPr txBox="1"/>
           <p:nvPr/>
         </p:nvSpPr>
@@ -15216,7 +15378,7 @@
       </p:sp>
       <p:sp>
         <p:nvSpPr>
-          <p:cNvPr id="5" name="Text 72"/>
+          <p:cNvPr id="5" name="Text 70"/>
           <p:cNvSpPr txBox="1"/>
           <p:nvPr/>
         </p:nvSpPr>
@@ -15306,7 +15468,7 @@
       </p:sp>
       <p:sp>
         <p:nvSpPr>
-          <p:cNvPr id="6" name="Text 73"/>
+          <p:cNvPr id="6" name="Text 71"/>
           <p:cNvSpPr txBox="1"/>
           <p:nvPr/>
         </p:nvSpPr>
@@ -15572,7 +15734,7 @@
       </p:sp>
       <p:sp>
         <p:nvSpPr>
-          <p:cNvPr id="5" name="Text 74"/>
+          <p:cNvPr id="5" name="Text 72"/>
           <p:cNvSpPr txBox="1"/>
           <p:nvPr/>
         </p:nvSpPr>
@@ -15662,7 +15824,7 @@
       </p:sp>
       <p:sp>
         <p:nvSpPr>
-          <p:cNvPr id="6" name="Text 75"/>
+          <p:cNvPr id="6" name="Text 73"/>
           <p:cNvSpPr txBox="1"/>
           <p:nvPr/>
         </p:nvSpPr>
@@ -15928,7 +16090,7 @@
       </p:sp>
       <p:sp>
         <p:nvSpPr>
-          <p:cNvPr id="5" name="Text 76"/>
+          <p:cNvPr id="5" name="Text 74"/>
           <p:cNvSpPr txBox="1"/>
           <p:nvPr/>
         </p:nvSpPr>
@@ -16018,7 +16180,7 @@
       </p:sp>
       <p:sp>
         <p:nvSpPr>
-          <p:cNvPr id="6" name="Text 77"/>
+          <p:cNvPr id="6" name="Text 75"/>
           <p:cNvSpPr txBox="1"/>
           <p:nvPr/>
         </p:nvSpPr>
@@ -16284,7 +16446,7 @@
       </p:sp>
       <p:sp>
         <p:nvSpPr>
-          <p:cNvPr id="5" name="Text 78"/>
+          <p:cNvPr id="5" name="Text 76"/>
           <p:cNvSpPr txBox="1"/>
           <p:nvPr/>
         </p:nvSpPr>
@@ -16323,7 +16485,7 @@
       </p:sp>
       <p:sp>
         <p:nvSpPr>
-          <p:cNvPr id="6" name="Text 79"/>
+          <p:cNvPr id="6" name="Text 77"/>
           <p:cNvSpPr txBox="1"/>
           <p:nvPr/>
         </p:nvSpPr>
@@ -16576,7 +16738,7 @@
       </p:sp>
       <p:graphicFrame>
         <p:nvGraphicFramePr>
-          <p:cNvPr id="28" name="Table 80"/>
+          <p:cNvPr id="28" name="Table 78"/>
           <p:cNvGraphicFramePr>
             <a:graphicFrameLocks noGrp="1"/>
           </p:cNvGraphicFramePr>
@@ -17399,7 +17561,7 @@
       </p:graphicFrame>
       <p:sp>
         <p:nvSpPr>
-          <p:cNvPr id="7" name="Text 81"/>
+          <p:cNvPr id="7" name="Text 79"/>
           <p:cNvSpPr txBox="1"/>
           <p:nvPr/>
         </p:nvSpPr>
@@ -17619,7 +17781,7 @@
       </p:sp>
       <p:sp>
         <p:nvSpPr>
-          <p:cNvPr id="6" name="Text 82"/>
+          <p:cNvPr id="6" name="Text 80"/>
           <p:cNvSpPr txBox="1"/>
           <p:nvPr/>
         </p:nvSpPr>
@@ -17681,7 +17843,7 @@
                   <a:schemeClr val="tx1"/>
                 </a:solidFill>
               </a:rPr>
-              <a:t>2021 pause: 3 leukaemias in SCD</a:t>
+              <a:t>Paused 2021: 3 leukaemias</a:t>
             </a:r>
             <a:endParaRPr lang="en-US" sz="1800" dirty="0"/>
           </a:p>
@@ -17689,7 +17851,7 @@
       </p:sp>
       <p:sp>
         <p:nvSpPr>
-          <p:cNvPr id="7" name="Text 83"/>
+          <p:cNvPr id="7" name="Text 81"/>
           <p:cNvSpPr txBox="1"/>
           <p:nvPr/>
         </p:nvSpPr>
@@ -17759,7 +17921,7 @@
       </p:sp>
       <p:sp>
         <p:nvSpPr>
-          <p:cNvPr id="8" name="Text 84"/>
+          <p:cNvPr id="8" name="Text 82"/>
           <p:cNvSpPr txBox="1"/>
           <p:nvPr/>
         </p:nvSpPr>
@@ -18013,7 +18175,7 @@
       </p:sp>
       <p:graphicFrame>
         <p:nvGraphicFramePr>
-          <p:cNvPr id="30" name="Table 85"/>
+          <p:cNvPr id="30" name="Table 83"/>
           <p:cNvGraphicFramePr>
             <a:graphicFrameLocks noGrp="1"/>
           </p:cNvGraphicFramePr>
@@ -18773,13 +18935,13 @@
       </p:graphicFrame>
       <p:sp>
         <p:nvSpPr>
-          <p:cNvPr id="7" name="Text 86"/>
+          <p:cNvPr id="7" name="Text 84"/>
           <p:cNvSpPr txBox="1"/>
           <p:nvPr/>
         </p:nvSpPr>
         <p:spPr>
           <a:xfrm>
-            <a:off x="685800" y="4023360"/>
+            <a:off x="685800" y="4526280"/>
             <a:ext cx="10817352" cy="411480"/>
           </a:xfrm>
           <a:prstGeom prst="rect">
@@ -19911,7 +20073,7 @@
       </p:sp>
       <p:graphicFrame>
         <p:nvGraphicFramePr>
-          <p:cNvPr id="31" name="Table 87"/>
+          <p:cNvPr id="31" name="Table 85"/>
           <p:cNvGraphicFramePr>
             <a:graphicFrameLocks noGrp="1"/>
           </p:cNvGraphicFramePr>
@@ -20961,7 +21123,21 @@
                   <a:schemeClr val="tx1"/>
                 </a:solidFill>
               </a:rPr>
-              <a:t>Engraftment 95%, OS 90% at 2 years</a:t>
+              <a:t>Engraftment 95%;</a:t>
+            </a:r>
+            <a:endParaRPr lang="en-US" sz="1500" dirty="0"/>
+          </a:p>
+          <a:p>
+            <a:pPr algn="ctr" indent="0" marL="0">
+              <a:buNone/>
+            </a:pPr>
+            <a:r>
+              <a:rPr lang="en-US" sz="1500" dirty="0">
+                <a:solidFill>
+                  <a:schemeClr val="tx1"/>
+                </a:solidFill>
+              </a:rPr>
+              <a:t>2-year OS 90%</a:t>
             </a:r>
             <a:endParaRPr lang="en-US" sz="1500" dirty="0"/>
           </a:p>
@@ -21065,7 +21241,21 @@
                   <a:schemeClr val="tx1"/>
                 </a:solidFill>
               </a:rPr>
-              <a:t>Upfront MUD HCT within 2–3 months</a:t>
+              <a:t>Upfront MUD HCT</a:t>
+            </a:r>
+            <a:endParaRPr lang="en-US" sz="1600" dirty="0"/>
+          </a:p>
+          <a:p>
+            <a:pPr algn="ctr" indent="0" marL="0">
+              <a:buNone/>
+            </a:pPr>
+            <a:r>
+              <a:rPr lang="en-US" sz="1600" b="1" dirty="0">
+                <a:solidFill>
+                  <a:schemeClr val="tx1"/>
+                </a:solidFill>
+              </a:rPr>
+              <a:t>within 2–3 months</a:t>
             </a:r>
             <a:endParaRPr lang="en-US" sz="1600" dirty="0"/>
           </a:p>
@@ -22386,42 +22576,6 @@
       </p:graphicFrame>
       <p:sp>
         <p:nvSpPr>
-          <p:cNvPr id="7" name="Text 33"/>
-          <p:cNvSpPr txBox="1"/>
-          <p:nvPr/>
-        </p:nvSpPr>
-        <p:spPr>
-          <a:xfrm>
-            <a:off x="685800" y="5486400"/>
-            <a:ext cx="10817352" cy="411480"/>
-          </a:xfrm>
-          <a:prstGeom prst="rect">
-            <a:avLst/>
-          </a:prstGeom>
-          <a:noFill/>
-          <a:ln/>
-        </p:spPr>
-        <p:txBody>
-          <a:bodyPr wrap="square" lIns="0" tIns="0" rIns="0" bIns="0" rtlCol="0" anchor="t"/>
-          <a:lstStyle/>
-          <a:p>
-            <a:pPr indent="0" marL="0">
-              <a:buNone/>
-            </a:pPr>
-            <a:r>
-              <a:rPr lang="en-US" sz="1600" b="1" dirty="0">
-                <a:solidFill>
-                  <a:schemeClr val="tx1"/>
-                </a:solidFill>
-              </a:rPr>
-              <a:t>FCC = fludarabine, cyclophosphamide, alemtuzumab (Campath)</a:t>
-            </a:r>
-            <a:endParaRPr lang="en-US" sz="1600" dirty="0"/>
-          </a:p>
-        </p:txBody>
-      </p:sp>
-      <p:sp>
-        <p:nvSpPr>
           <p:cNvPr id="25" name="Slide Number Placeholder 0"/>
           <p:cNvSpPr>
             <a:spLocks noGrp="1"/>
@@ -22606,7 +22760,7 @@
       </p:sp>
       <p:graphicFrame>
         <p:nvGraphicFramePr>
-          <p:cNvPr id="7" name="Table 34"/>
+          <p:cNvPr id="7" name="Table 33"/>
           <p:cNvGraphicFramePr>
             <a:graphicFrameLocks noGrp="1"/>
           </p:cNvGraphicFramePr>
@@ -23805,7 +23959,7 @@
       </p:sp>
       <p:graphicFrame>
         <p:nvGraphicFramePr>
-          <p:cNvPr id="8" name="Table 35"/>
+          <p:cNvPr id="8" name="Table 34"/>
           <p:cNvGraphicFramePr>
             <a:graphicFrameLocks noGrp="1"/>
           </p:cNvGraphicFramePr>
@@ -24687,7 +24841,7 @@
       </p:sp>
       <p:graphicFrame>
         <p:nvGraphicFramePr>
-          <p:cNvPr id="9" name="Table 36"/>
+          <p:cNvPr id="9" name="Table 35"/>
           <p:cNvGraphicFramePr>
             <a:graphicFrameLocks noGrp="1"/>
           </p:cNvGraphicFramePr>
@@ -25569,7 +25723,7 @@
       </p:sp>
       <p:sp>
         <p:nvSpPr>
-          <p:cNvPr id="6" name="Box 37"/>
+          <p:cNvPr id="6" name="Box 36"/>
           <p:cNvSpPr txBox="1"/>
           <p:nvPr/>
         </p:nvSpPr>
@@ -25635,7 +25789,7 @@
       </p:sp>
       <p:sp>
         <p:nvSpPr>
-          <p:cNvPr id="8" name="Box 38"/>
+          <p:cNvPr id="8" name="Box 37"/>
           <p:cNvSpPr txBox="1"/>
           <p:nvPr/>
         </p:nvSpPr>
@@ -25701,7 +25855,7 @@
       </p:sp>
       <p:sp>
         <p:nvSpPr>
-          <p:cNvPr id="10" name="Box 39"/>
+          <p:cNvPr id="10" name="Box 38"/>
           <p:cNvSpPr txBox="1"/>
           <p:nvPr/>
         </p:nvSpPr>
@@ -25767,7 +25921,7 @@
       </p:sp>
       <p:sp>
         <p:nvSpPr>
-          <p:cNvPr id="12" name="Box 40"/>
+          <p:cNvPr id="12" name="Box 39"/>
           <p:cNvSpPr txBox="1"/>
           <p:nvPr/>
         </p:nvSpPr>
@@ -25809,7 +25963,7 @@
       </p:sp>
       <p:sp>
         <p:nvSpPr>
-          <p:cNvPr id="13" name="Text 41"/>
+          <p:cNvPr id="13" name="Text 40"/>
           <p:cNvSpPr txBox="1"/>
           <p:nvPr/>
         </p:nvSpPr>

--- a/slides/decks/s17-marrow-failure-hemoglobinopathies.pptx
+++ b/slides/decks/s17-marrow-failure-hemoglobinopathies.pptx
@@ -136,13 +136,13 @@
   <p:extLst>
     <p:ext uri="{521415D9-36F7-43E2-AB2F-B90AF26B5E84}">
       <p14:sectionLst xmlns:p14="http://schemas.microsoft.com/office/powerpoint/2010/main">
-        <p14:section name="Opening" id="{ea964e8a-3a99-dab5-f40b-58dd3a947c30}">
+        <p14:section name="Opening" id="{050391a1-54fa-c466-e74a-a0389998ceb2}">
           <p14:sldIdLst>
             <p14:sldId id="256"/>
             <p14:sldId id="257"/>
           </p14:sldIdLst>
         </p14:section>
-        <p14:section name="Aplastic anaemia and PNH" id="{db5035a1-41ad-b1a6-8dcc-a39f03caac8e}">
+        <p14:section name="Aplastic anaemia and PNH" id="{5109f720-a010-c86d-e85a-0a453e944332}">
           <p14:sldIdLst>
             <p14:sldId id="258"/>
             <p14:sldId id="259"/>
@@ -151,7 +151,7 @@
             <p14:sldId id="262"/>
           </p14:sldIdLst>
         </p14:section>
-        <p14:section name="Inherited marrow failure" id="{d9bbbf90-4f1e-133e-20ed-6043d11e7eec}">
+        <p14:section name="Inherited marrow failure" id="{f65e85b3-bb11-4be8-64fb-b248d007fc79}">
           <p14:sldIdLst>
             <p14:sldId id="263"/>
             <p14:sldId id="264"/>
@@ -159,7 +159,7 @@
             <p14:sldId id="266"/>
           </p14:sldIdLst>
         </p14:section>
-        <p14:section name="Haemoglobinopathies" id="{6184812c-753f-8c85-9398-7ebf1d1d2309}">
+        <p14:section name="Haemoglobinopathies" id="{bc84035a-58dc-8ef5-39d2-bbdb80e17324}">
           <p14:sldIdLst>
             <p14:sldId id="267"/>
             <p14:sldId id="268"/>
@@ -168,7 +168,7 @@
             <p14:sldId id="271"/>
           </p14:sldIdLst>
         </p14:section>
-        <p14:section name="Board questions" id="{f8bfb331-d9c4-6aaf-e4c1-9617ce38ad80}">
+        <p14:section name="Board questions" id="{69f8f80c-8d58-30a0-5f27-8a821eb7c249}">
           <p14:sldIdLst>
             <p14:sldId id="272"/>
             <p14:sldId id="273"/>
@@ -178,7 +178,7 @@
             <p14:sldId id="277"/>
           </p14:sldIdLst>
         </p14:section>
-        <p14:section name="References" id="{62fc93ad-3f22-5366-803a-d23f471d8158}">
+        <p14:section name="References" id="{a22da7c8-5bdf-e0a8-7809-fcb8a330274c}">
           <p14:sldIdLst>
             <p14:sldId id="278"/>
             <p14:sldId id="279"/>
@@ -186,7 +186,7 @@
             <p14:sldId id="281"/>
           </p14:sldIdLst>
         </p14:section>
-        <p14:section name="Backup" id="{263d1035-874a-c9b9-88f6-28e1fd24bc7e}">
+        <p14:section name="Backup" id="{60714603-5e66-9b20-2077-95b3946039d4}">
           <p14:sldIdLst>
             <p14:sldId id="282"/>
             <p14:sldId id="283"/>
